--- a/course-content/security-tutor/day-04/presentation.pptx
+++ b/course-content/security-tutor/day-04/presentation.pptx
@@ -16,6 +16,7 @@
     <p:sldId id="264" r:id="rId10"/>
     <p:sldId id="265" r:id="rId11"/>
     <p:sldId id="266" r:id="rId12"/>
+    <p:sldId id="267" r:id="rId18"/>
   </p:sldIdLst>
   <p:notesMasterIdLst>
     <p:notesMasterId r:id="rId13"/>
@@ -1882,6 +1883,30 @@
           </a:p>
         </p:txBody>
       </p:sp>
+      <p:pic>
+        <p:nvPicPr>
+          <p:cNvPr id="90001" name="Brand Logo"/>
+          <p:cNvPicPr>
+            <a:picLocks noChangeAspect="1"/>
+          </p:cNvPicPr>
+          <p:nvPr/>
+        </p:nvPicPr>
+        <p:blipFill>
+          <a:blip r:embed="rId3"/>
+          <a:stretch>
+            <a:fillRect/>
+          </a:stretch>
+        </p:blipFill>
+        <p:spPr>
+          <a:xfrm>
+            <a:off x="11503152" y="6172200"/>
+            <a:ext cx="548640" cy="548640"/>
+          </a:xfrm>
+          <a:prstGeom prst="rect">
+            <a:avLst/>
+          </a:prstGeom>
+        </p:spPr>
+      </p:pic>
     </p:spTree>
   </p:cSld>
   <p:clrMapOvr>
@@ -2083,6 +2108,30 @@
           </a:p>
         </p:txBody>
       </p:sp>
+      <p:pic>
+        <p:nvPicPr>
+          <p:cNvPr id="90001" name="Brand Logo"/>
+          <p:cNvPicPr>
+            <a:picLocks noChangeAspect="1"/>
+          </p:cNvPicPr>
+          <p:nvPr/>
+        </p:nvPicPr>
+        <p:blipFill>
+          <a:blip r:embed="rId3"/>
+          <a:stretch>
+            <a:fillRect/>
+          </a:stretch>
+        </p:blipFill>
+        <p:spPr>
+          <a:xfrm>
+            <a:off x="11503152" y="6172200"/>
+            <a:ext cx="548640" cy="548640"/>
+          </a:xfrm>
+          <a:prstGeom prst="rect">
+            <a:avLst/>
+          </a:prstGeom>
+        </p:spPr>
+      </p:pic>
     </p:spTree>
   </p:cSld>
   <p:clrMapOvr>
@@ -2255,10 +2304,299 @@
           </a:p>
         </p:txBody>
       </p:sp>
+      <p:pic>
+        <p:nvPicPr>
+          <p:cNvPr id="90001" name="Brand Logo"/>
+          <p:cNvPicPr>
+            <a:picLocks noChangeAspect="1"/>
+          </p:cNvPicPr>
+          <p:nvPr/>
+        </p:nvPicPr>
+        <p:blipFill>
+          <a:blip r:embed="rId3"/>
+          <a:stretch>
+            <a:fillRect/>
+          </a:stretch>
+        </p:blipFill>
+        <p:spPr>
+          <a:xfrm>
+            <a:off x="11503152" y="6172200"/>
+            <a:ext cx="548640" cy="548640"/>
+          </a:xfrm>
+          <a:prstGeom prst="rect">
+            <a:avLst/>
+          </a:prstGeom>
+        </p:spPr>
+      </p:pic>
     </p:spTree>
   </p:cSld>
   <p:clrMapOvr>
     <a:masterClrMapping/>
+  </p:clrMapOvr>
+</p:sld>
+</file>
+
+<file path=ppt/slides/slide12.xml><?xml version="1.0" encoding="utf-8"?>
+<p:sld xmlns:a="http://schemas.openxmlformats.org/drawingml/2006/main" xmlns:r="http://schemas.openxmlformats.org/officeDocument/2006/relationships" xmlns:p="http://schemas.openxmlformats.org/presentationml/2006/main">
+  <p:cSld name="Closing Slide">
+    <p:bg>
+      <p:bgPr>
+        <a:solidFill>
+          <a:srgbClr val="14181F"/>
+        </a:solidFill>
+      </p:bgPr>
+    </p:bg>
+    <p:spTree>
+      <p:nvGrpSpPr>
+        <p:cNvPr id="1" name=""/>
+        <p:cNvGrpSpPr/>
+        <p:nvPr/>
+      </p:nvGrpSpPr>
+      <p:grpSpPr>
+        <a:xfrm>
+          <a:off x="0" y="0"/>
+          <a:ext cx="0" cy="0"/>
+          <a:chOff x="0" y="0"/>
+          <a:chExt cx="0" cy="0"/>
+        </a:xfrm>
+      </p:grpSpPr>
+      <p:sp>
+        <p:nvSpPr>
+          <p:cNvPr id="2" name="Label"/>
+          <p:cNvSpPr/>
+          <p:nvPr/>
+        </p:nvSpPr>
+        <p:spPr>
+          <a:xfrm>
+            <a:off x="731520" y="548640"/>
+            <a:ext cx="7000000" cy="457200"/>
+          </a:xfrm>
+          <a:prstGeom prst="rect">
+            <a:avLst/>
+          </a:prstGeom>
+          <a:noFill/>
+          <a:ln/>
+        </p:spPr>
+        <p:txBody>
+          <a:bodyPr wrap="square" rtlCol="0" anchor="t"/>
+          <a:lstStyle/>
+          <a:p>
+            <a:pPr indent="0" marL="0">
+              <a:buNone/>
+            </a:pPr>
+            <a:r>
+              <a:rPr lang="en-US" sz="1600" spc="300" dirty="0">
+                <a:solidFill>
+                  <a:srgbClr val="2FDD95"/>
+                </a:solidFill>
+                <a:latin typeface="Courier New" pitchFamily="34" charset="0"/>
+              </a:rPr>
+              <a:t>ABOUT THE TRAINER</a:t>
+            </a:r>
+            <a:endParaRPr lang="en-US" sz="1600"/>
+          </a:p>
+        </p:txBody>
+      </p:sp>
+      <p:sp>
+        <p:nvSpPr>
+          <p:cNvPr id="3" name="Name"/>
+          <p:cNvSpPr/>
+          <p:nvPr/>
+        </p:nvSpPr>
+        <p:spPr>
+          <a:xfrm>
+            <a:off x="731520" y="1300000"/>
+            <a:ext cx="7000000" cy="700000"/>
+          </a:xfrm>
+          <a:prstGeom prst="rect">
+            <a:avLst/>
+          </a:prstGeom>
+          <a:noFill/>
+          <a:ln/>
+        </p:spPr>
+        <p:txBody>
+          <a:bodyPr wrap="square" rtlCol="0" anchor="t"/>
+          <a:lstStyle/>
+          <a:p>
+            <a:pPr indent="0" marL="0">
+              <a:buNone/>
+            </a:pPr>
+            <a:r>
+              <a:rPr lang="en-US" sz="3600" b="1" dirty="0">
+                <a:solidFill>
+                  <a:srgbClr val="F2F2F2"/>
+                </a:solidFill>
+                <a:latin typeface="Cambria" pitchFamily="34" charset="0"/>
+              </a:rPr>
+              <a:t>Abdul Aziz Khan</a:t>
+            </a:r>
+            <a:endParaRPr lang="en-US" sz="3600"/>
+          </a:p>
+        </p:txBody>
+      </p:sp>
+      <p:sp>
+        <p:nvSpPr>
+          <p:cNvPr id="4" name="Role"/>
+          <p:cNvSpPr/>
+          <p:nvPr/>
+        </p:nvSpPr>
+        <p:spPr>
+          <a:xfrm>
+            <a:off x="731520" y="2150000"/>
+            <a:ext cx="7000000" cy="450000"/>
+          </a:xfrm>
+          <a:prstGeom prst="rect">
+            <a:avLst/>
+          </a:prstGeom>
+          <a:noFill/>
+          <a:ln/>
+        </p:spPr>
+        <p:txBody>
+          <a:bodyPr wrap="square" rtlCol="0" anchor="t"/>
+          <a:lstStyle/>
+          <a:p>
+            <a:pPr indent="0" marL="0">
+              <a:buNone/>
+            </a:pPr>
+            <a:r>
+              <a:rPr lang="en-US" sz="1800" dirty="0">
+                <a:solidFill>
+                  <a:srgbClr val="2FDD95"/>
+                </a:solidFill>
+                <a:latin typeface="Calibri" pitchFamily="34" charset="0"/>
+              </a:rPr>
+              <a:t>Trainer, BrainsWork</a:t>
+            </a:r>
+            <a:endParaRPr lang="en-US" sz="1800"/>
+          </a:p>
+        </p:txBody>
+      </p:sp>
+      <p:sp>
+        <p:nvSpPr>
+          <p:cNvPr id="5" name="Bio"/>
+          <p:cNvSpPr/>
+          <p:nvPr/>
+        </p:nvSpPr>
+        <p:spPr>
+          <a:xfrm>
+            <a:off x="731520" y="2750000"/>
+            <a:ext cx="7000000" cy="2400000"/>
+          </a:xfrm>
+          <a:prstGeom prst="rect">
+            <a:avLst/>
+          </a:prstGeom>
+          <a:noFill/>
+          <a:ln/>
+        </p:spPr>
+        <p:txBody>
+          <a:bodyPr wrap="square" rtlCol="0" anchor="t"/>
+          <a:lstStyle/>
+          <a:p>
+            <a:pPr indent="0" marL="0">
+              <a:buNone/>
+            </a:pPr>
+            <a:r>
+              <a:rPr lang="en-US" sz="1400" dirty="0">
+                <a:solidFill>
+                  <a:srgbClr val="9AA3AE"/>
+                </a:solidFill>
+                <a:latin typeface="Calibri" pitchFamily="34" charset="0"/>
+              </a:rPr>
+              <a:t>Abdul Aziz Khan is a seasoned Telecom and IT professional, currently working as a DevOps engineer for a Fortune 500 financial company. A long-time practitioner turned teacher, he built this course to make security concepts concrete through real, hands-on labs rather than slides alone. Open, candid, and always glad to talk shop.</a:t>
+            </a:r>
+            <a:endParaRPr lang="en-US" sz="1400"/>
+          </a:p>
+        </p:txBody>
+      </p:sp>
+      <p:sp>
+        <p:nvSpPr>
+          <p:cNvPr id="6" name="Contact"/>
+          <p:cNvSpPr/>
+          <p:nvPr/>
+        </p:nvSpPr>
+        <p:spPr>
+          <a:xfrm>
+            <a:off x="731520" y="5450000"/>
+            <a:ext cx="7000000" cy="400000"/>
+          </a:xfrm>
+          <a:prstGeom prst="rect">
+            <a:avLst/>
+          </a:prstGeom>
+          <a:noFill/>
+          <a:ln/>
+        </p:spPr>
+        <p:txBody>
+          <a:bodyPr wrap="square" rtlCol="0" anchor="t"/>
+          <a:lstStyle/>
+          <a:p>
+            <a:pPr indent="0" marL="0">
+              <a:buNone/>
+            </a:pPr>
+            <a:r>
+              <a:rPr lang="en-US" sz="1300" dirty="0">
+                <a:solidFill>
+                  <a:srgbClr val="F2F2F2"/>
+                </a:solidFill>
+                <a:latin typeface="Calibri" pitchFamily="34" charset="0"/>
+              </a:rPr>
+              <a:t>khan.abdulaziz@gmail.com   |   linkedin.com/in/abdulazizk</a:t>
+            </a:r>
+            <a:endParaRPr lang="en-US" sz="1300"/>
+          </a:p>
+        </p:txBody>
+      </p:sp>
+      <p:pic>
+        <p:nvPicPr>
+          <p:cNvPr id="7" name="Trainer Photo"/>
+          <p:cNvPicPr>
+            <a:picLocks noChangeAspect="1"/>
+          </p:cNvPicPr>
+          <p:nvPr/>
+        </p:nvPicPr>
+        <p:blipFill>
+          <a:blip r:embed="rId3"/>
+          <a:stretch>
+            <a:fillRect/>
+          </a:stretch>
+        </p:blipFill>
+        <p:spPr>
+          <a:xfrm>
+            <a:off x="9400032" y="2057400"/>
+            <a:ext cx="2057400" cy="2743200"/>
+          </a:xfrm>
+          <a:prstGeom prst="rect">
+            <a:avLst/>
+          </a:prstGeom>
+        </p:spPr>
+      </p:pic>
+      <p:pic>
+        <p:nvPicPr>
+          <p:cNvPr id="8" name="Brand Logo"/>
+          <p:cNvPicPr>
+            <a:picLocks noChangeAspect="1"/>
+          </p:cNvPicPr>
+          <p:nvPr/>
+        </p:nvPicPr>
+        <p:blipFill>
+          <a:blip r:embed="rId2"/>
+          <a:stretch>
+            <a:fillRect/>
+          </a:stretch>
+        </p:blipFill>
+        <p:spPr>
+          <a:xfrm>
+            <a:off x="11503152" y="6172200"/>
+            <a:ext cx="548640" cy="548640"/>
+          </a:xfrm>
+          <a:prstGeom prst="rect">
+            <a:avLst/>
+          </a:prstGeom>
+        </p:spPr>
+      </p:pic>
+    </p:spTree>
+  </p:cSld>
+  <p:clrMapOvr>
+    <a:overrideClrMapping bg1="lt1" tx1="dk1" bg2="lt2" tx2="dk2" accent1="accent1" accent2="accent2" accent3="accent3" accent4="accent4" accent5="accent5" accent6="accent6" hlink="hlink" folHlink="folHlink"/>
   </p:clrMapOvr>
 </p:sld>
 </file>
@@ -2404,6 +2742,30 @@
           </a:p>
         </p:txBody>
       </p:sp>
+      <p:pic>
+        <p:nvPicPr>
+          <p:cNvPr id="90001" name="Brand Logo"/>
+          <p:cNvPicPr>
+            <a:picLocks noChangeAspect="1"/>
+          </p:cNvPicPr>
+          <p:nvPr/>
+        </p:nvPicPr>
+        <p:blipFill>
+          <a:blip r:embed="rId3"/>
+          <a:stretch>
+            <a:fillRect/>
+          </a:stretch>
+        </p:blipFill>
+        <p:spPr>
+          <a:xfrm>
+            <a:off x="11503152" y="6172200"/>
+            <a:ext cx="548640" cy="548640"/>
+          </a:xfrm>
+          <a:prstGeom prst="rect">
+            <a:avLst/>
+          </a:prstGeom>
+        </p:spPr>
+      </p:pic>
     </p:spTree>
   </p:cSld>
   <p:clrMapOvr>
@@ -2620,6 +2982,30 @@
           </a:p>
         </p:txBody>
       </p:sp>
+      <p:pic>
+        <p:nvPicPr>
+          <p:cNvPr id="90001" name="Brand Logo"/>
+          <p:cNvPicPr>
+            <a:picLocks noChangeAspect="1"/>
+          </p:cNvPicPr>
+          <p:nvPr/>
+        </p:nvPicPr>
+        <p:blipFill>
+          <a:blip r:embed="rId3"/>
+          <a:stretch>
+            <a:fillRect/>
+          </a:stretch>
+        </p:blipFill>
+        <p:spPr>
+          <a:xfrm>
+            <a:off x="11503152" y="6172200"/>
+            <a:ext cx="548640" cy="548640"/>
+          </a:xfrm>
+          <a:prstGeom prst="rect">
+            <a:avLst/>
+          </a:prstGeom>
+        </p:spPr>
+      </p:pic>
     </p:spTree>
   </p:cSld>
   <p:clrMapOvr>
@@ -2815,6 +3201,30 @@
           </a:p>
         </p:txBody>
       </p:sp>
+      <p:pic>
+        <p:nvPicPr>
+          <p:cNvPr id="90001" name="Brand Logo"/>
+          <p:cNvPicPr>
+            <a:picLocks noChangeAspect="1"/>
+          </p:cNvPicPr>
+          <p:nvPr/>
+        </p:nvPicPr>
+        <p:blipFill>
+          <a:blip r:embed="rId3"/>
+          <a:stretch>
+            <a:fillRect/>
+          </a:stretch>
+        </p:blipFill>
+        <p:spPr>
+          <a:xfrm>
+            <a:off x="11503152" y="6172200"/>
+            <a:ext cx="548640" cy="548640"/>
+          </a:xfrm>
+          <a:prstGeom prst="rect">
+            <a:avLst/>
+          </a:prstGeom>
+        </p:spPr>
+      </p:pic>
     </p:spTree>
   </p:cSld>
   <p:clrMapOvr>
@@ -3031,6 +3441,30 @@
           </a:p>
         </p:txBody>
       </p:sp>
+      <p:pic>
+        <p:nvPicPr>
+          <p:cNvPr id="90001" name="Brand Logo"/>
+          <p:cNvPicPr>
+            <a:picLocks noChangeAspect="1"/>
+          </p:cNvPicPr>
+          <p:nvPr/>
+        </p:nvPicPr>
+        <p:blipFill>
+          <a:blip r:embed="rId3"/>
+          <a:stretch>
+            <a:fillRect/>
+          </a:stretch>
+        </p:blipFill>
+        <p:spPr>
+          <a:xfrm>
+            <a:off x="11503152" y="6172200"/>
+            <a:ext cx="548640" cy="548640"/>
+          </a:xfrm>
+          <a:prstGeom prst="rect">
+            <a:avLst/>
+          </a:prstGeom>
+        </p:spPr>
+      </p:pic>
     </p:spTree>
   </p:cSld>
   <p:clrMapOvr>
@@ -3384,6 +3818,30 @@
           </a:p>
         </p:txBody>
       </p:sp>
+      <p:pic>
+        <p:nvPicPr>
+          <p:cNvPr id="90001" name="Brand Logo"/>
+          <p:cNvPicPr>
+            <a:picLocks noChangeAspect="1"/>
+          </p:cNvPicPr>
+          <p:nvPr/>
+        </p:nvPicPr>
+        <p:blipFill>
+          <a:blip r:embed="rId3"/>
+          <a:stretch>
+            <a:fillRect/>
+          </a:stretch>
+        </p:blipFill>
+        <p:spPr>
+          <a:xfrm>
+            <a:off x="11503152" y="6172200"/>
+            <a:ext cx="548640" cy="548640"/>
+          </a:xfrm>
+          <a:prstGeom prst="rect">
+            <a:avLst/>
+          </a:prstGeom>
+        </p:spPr>
+      </p:pic>
     </p:spTree>
   </p:cSld>
   <p:clrMapOvr>
@@ -3758,6 +4216,30 @@
           </a:p>
         </p:txBody>
       </p:sp>
+      <p:pic>
+        <p:nvPicPr>
+          <p:cNvPr id="90001" name="Brand Logo"/>
+          <p:cNvPicPr>
+            <a:picLocks noChangeAspect="1"/>
+          </p:cNvPicPr>
+          <p:nvPr/>
+        </p:nvPicPr>
+        <p:blipFill>
+          <a:blip r:embed="rId3"/>
+          <a:stretch>
+            <a:fillRect/>
+          </a:stretch>
+        </p:blipFill>
+        <p:spPr>
+          <a:xfrm>
+            <a:off x="11503152" y="6172200"/>
+            <a:ext cx="548640" cy="548640"/>
+          </a:xfrm>
+          <a:prstGeom prst="rect">
+            <a:avLst/>
+          </a:prstGeom>
+        </p:spPr>
+      </p:pic>
     </p:spTree>
   </p:cSld>
   <p:clrMapOvr>
@@ -4078,6 +4560,30 @@
           </a:p>
         </p:txBody>
       </p:sp>
+      <p:pic>
+        <p:nvPicPr>
+          <p:cNvPr id="90001" name="Brand Logo"/>
+          <p:cNvPicPr>
+            <a:picLocks noChangeAspect="1"/>
+          </p:cNvPicPr>
+          <p:nvPr/>
+        </p:nvPicPr>
+        <p:blipFill>
+          <a:blip r:embed="rId3"/>
+          <a:stretch>
+            <a:fillRect/>
+          </a:stretch>
+        </p:blipFill>
+        <p:spPr>
+          <a:xfrm>
+            <a:off x="11503152" y="6172200"/>
+            <a:ext cx="548640" cy="548640"/>
+          </a:xfrm>
+          <a:prstGeom prst="rect">
+            <a:avLst/>
+          </a:prstGeom>
+        </p:spPr>
+      </p:pic>
     </p:spTree>
   </p:cSld>
   <p:clrMapOvr>
@@ -4422,6 +4928,30 @@
           </a:p>
         </p:txBody>
       </p:sp>
+      <p:pic>
+        <p:nvPicPr>
+          <p:cNvPr id="90001" name="Brand Logo"/>
+          <p:cNvPicPr>
+            <a:picLocks noChangeAspect="1"/>
+          </p:cNvPicPr>
+          <p:nvPr/>
+        </p:nvPicPr>
+        <p:blipFill>
+          <a:blip r:embed="rId3"/>
+          <a:stretch>
+            <a:fillRect/>
+          </a:stretch>
+        </p:blipFill>
+        <p:spPr>
+          <a:xfrm>
+            <a:off x="11503152" y="6172200"/>
+            <a:ext cx="548640" cy="548640"/>
+          </a:xfrm>
+          <a:prstGeom prst="rect">
+            <a:avLst/>
+          </a:prstGeom>
+        </p:spPr>
+      </p:pic>
     </p:spTree>
   </p:cSld>
   <p:clrMapOvr>
